--- a/final_presentation_slides_pretty.pptx
+++ b/final_presentation_slides_pretty.pptx
@@ -8111,8 +8111,8 @@
         </p:nvSpPr>
         <p:spPr>
           <a:xfrm>
-            <a:off x="7589520" y="1572768"/>
-            <a:ext cx="3794760" cy="237744"/>
+            <a:off x="777240" y="1554480"/>
+            <a:ext cx="6309360" cy="237744"/>
           </a:xfrm>
           <a:prstGeom prst="rect">
             <a:avLst/>
@@ -8137,21 +8137,78 @@
                 </a:solidFill>
                 <a:latin typeface="Consolas"/>
               </a:rPr>
-              <a:t>REFERENCE — PAPER</a:t>
-            </a:r>
-          </a:p>
-        </p:txBody>
-      </p:sp>
-      <p:sp>
-        <p:nvSpPr>
-          <p:cNvPr id="7" name="Rectangle 6"/>
+              <a:t>REFERENCE — ZOROWITZ ET AL.</a:t>
+            </a:r>
+          </a:p>
+        </p:txBody>
+      </p:sp>
+      <p:sp>
+        <p:nvSpPr>
+          <p:cNvPr id="7" name="TextBox 6"/>
+          <p:cNvSpPr txBox="1"/>
+          <p:nvPr/>
+        </p:nvSpPr>
+        <p:spPr>
+          <a:xfrm>
+            <a:off x="777240" y="1865376"/>
+            <a:ext cx="6263640" cy="1097280"/>
+          </a:xfrm>
+          <a:prstGeom prst="rect">
+            <a:avLst/>
+          </a:prstGeom>
+          <a:noFill/>
+        </p:spPr>
+        <p:txBody>
+          <a:bodyPr wrap="square" lIns="0" rIns="0" tIns="0" bIns="0">
+            <a:spAutoFit/>
+          </a:bodyPr>
+          <a:lstStyle/>
+          <a:p>
+            <a:pPr algn="l">
+              <a:lnSpc>
+                <a:spcPct val="124000"/>
+              </a:lnSpc>
+            </a:pPr>
+            <a:r>
+              <a:rPr sz="1250" b="0">
+                <a:solidFill>
+                  <a:srgbClr val="3B4A59"/>
+                </a:solidFill>
+                <a:latin typeface="Archivo"/>
+              </a:rPr>
+              <a:t>The paper's own result: </a:t>
+            </a:r>
+            <a:r>
+              <a:rPr sz="1250" b="1">
+                <a:solidFill>
+                  <a:srgbClr val="0D141C"/>
+                </a:solidFill>
+                <a:latin typeface="Archivo"/>
+              </a:rPr>
+              <a:t>correlations that look significant under no screening largely vanish once inattentive participants are removed.</a:t>
+            </a:r>
+            <a:r>
+              <a:rPr sz="1250" b="0">
+                <a:solidFill>
+                  <a:srgbClr val="3B4A59"/>
+                </a:solidFill>
+                <a:latin typeface="Archivo"/>
+              </a:rPr>
+              <a:t>  Our five conditions reproduce that sweep while varying only how much evidence the agent has for spotting them.</a:t>
+            </a:r>
+          </a:p>
+        </p:txBody>
+      </p:sp>
+      <p:sp>
+        <p:nvSpPr>
+          <p:cNvPr id="8" name="Rectangle 7"/>
           <p:cNvSpPr/>
           <p:nvPr/>
         </p:nvSpPr>
         <p:spPr>
           <a:xfrm>
-            <a:off x="7589520" y="1847088"/>
-            <a:ext cx="3794760" cy="1234440"/>
+            <a:off x="7360920" y="1810512"/>
+            <a:ext cx="4023360" cy="1316736"/>
           </a:xfrm>
           <a:prstGeom prst="rect">
             <a:avLst/>
@@ -8190,7 +8247,7 @@
       </p:sp>
       <p:pic>
         <p:nvPicPr>
-          <p:cNvPr id="8" name="Picture 7" descr="s6_2.png"/>
+          <p:cNvPr id="9" name="Picture 8" descr="s6_2.png"/>
           <p:cNvPicPr>
             <a:picLocks noChangeAspect="1"/>
           </p:cNvPicPr>
@@ -8204,53 +8261,14 @@
         </p:blipFill>
         <p:spPr>
           <a:xfrm>
-            <a:off x="7662672" y="1911095"/>
-            <a:ext cx="3648456" cy="1524820"/>
+            <a:off x="7443216" y="1874519"/>
+            <a:ext cx="3858768" cy="1612717"/>
           </a:xfrm>
           <a:prstGeom prst="rect">
             <a:avLst/>
           </a:prstGeom>
         </p:spPr>
       </p:pic>
-      <p:sp>
-        <p:nvSpPr>
-          <p:cNvPr id="9" name="TextBox 8"/>
-          <p:cNvSpPr txBox="1"/>
-          <p:nvPr/>
-        </p:nvSpPr>
-        <p:spPr>
-          <a:xfrm>
-            <a:off x="777240" y="1572768"/>
-            <a:ext cx="6400800" cy="237744"/>
-          </a:xfrm>
-          <a:prstGeom prst="rect">
-            <a:avLst/>
-          </a:prstGeom>
-          <a:noFill/>
-        </p:spPr>
-        <p:txBody>
-          <a:bodyPr wrap="square" lIns="0" rIns="0" tIns="0" bIns="0">
-            <a:spAutoFit/>
-          </a:bodyPr>
-          <a:lstStyle/>
-          <a:p>
-            <a:pPr algn="l">
-              <a:lnSpc>
-                <a:spcPct val="124000"/>
-              </a:lnSpc>
-            </a:pPr>
-            <a:r>
-              <a:rPr sz="950" b="0" spc="130">
-                <a:solidFill>
-                  <a:srgbClr val="6B7A87"/>
-                </a:solidFill>
-                <a:latin typeface="Consolas"/>
-              </a:rPr>
-              <a:t>OURS — FIVE DATA CONDITIONS</a:t>
-            </a:r>
-          </a:p>
-        </p:txBody>
-      </p:sp>
       <p:sp>
         <p:nvSpPr>
           <p:cNvPr id="10" name="Rectangle 9"/>
@@ -8259,8 +8277,91 @@
         </p:nvSpPr>
         <p:spPr>
           <a:xfrm>
-            <a:off x="777240" y="3401568"/>
-            <a:ext cx="2084831" cy="1481328"/>
+            <a:off x="777240" y="3291840"/>
+            <a:ext cx="10607040" cy="12801"/>
+          </a:xfrm>
+          <a:prstGeom prst="rect">
+            <a:avLst/>
+          </a:prstGeom>
+          <a:solidFill>
+            <a:srgbClr val="D3DBE2"/>
+          </a:solidFill>
+          <a:ln>
+            <a:noFill/>
+          </a:ln>
+          <a:effectLst/>
+        </p:spPr>
+        <p:style>
+          <a:lnRef idx="1">
+            <a:schemeClr val="accent1"/>
+          </a:lnRef>
+          <a:fillRef idx="3">
+            <a:schemeClr val="accent1"/>
+          </a:fillRef>
+          <a:effectRef idx="2">
+            <a:schemeClr val="accent1"/>
+          </a:effectRef>
+          <a:fontRef idx="minor">
+            <a:schemeClr val="lt1"/>
+          </a:fontRef>
+        </p:style>
+        <p:txBody>
+          <a:bodyPr rtlCol="0" anchor="ctr"/>
+          <a:lstStyle/>
+          <a:p>
+            <a:pPr algn="ctr"/>
+          </a:p>
+        </p:txBody>
+      </p:sp>
+      <p:sp>
+        <p:nvSpPr>
+          <p:cNvPr id="11" name="TextBox 10"/>
+          <p:cNvSpPr txBox="1"/>
+          <p:nvPr/>
+        </p:nvSpPr>
+        <p:spPr>
+          <a:xfrm>
+            <a:off x="777240" y="3438144"/>
+            <a:ext cx="6400800" cy="237744"/>
+          </a:xfrm>
+          <a:prstGeom prst="rect">
+            <a:avLst/>
+          </a:prstGeom>
+          <a:noFill/>
+        </p:spPr>
+        <p:txBody>
+          <a:bodyPr wrap="square" lIns="0" rIns="0" tIns="0" bIns="0">
+            <a:spAutoFit/>
+          </a:bodyPr>
+          <a:lstStyle/>
+          <a:p>
+            <a:pPr algn="l">
+              <a:lnSpc>
+                <a:spcPct val="124000"/>
+              </a:lnSpc>
+            </a:pPr>
+            <a:r>
+              <a:rPr sz="950" b="0" spc="130">
+                <a:solidFill>
+                  <a:srgbClr val="6B7A87"/>
+                </a:solidFill>
+                <a:latin typeface="Consolas"/>
+              </a:rPr>
+              <a:t>OURS — SIGNIFICANT CORRELATIONS REMAINING</a:t>
+            </a:r>
+          </a:p>
+        </p:txBody>
+      </p:sp>
+      <p:sp>
+        <p:nvSpPr>
+          <p:cNvPr id="12" name="Rectangle 11"/>
+          <p:cNvSpPr/>
+          <p:nvPr/>
+        </p:nvSpPr>
+        <p:spPr>
+          <a:xfrm>
+            <a:off x="777240" y="3675887"/>
+            <a:ext cx="2048256" cy="1627632"/>
           </a:xfrm>
           <a:prstGeom prst="rect">
             <a:avLst/>
@@ -8299,7 +8400,7 @@
       </p:sp>
       <p:pic>
         <p:nvPicPr>
-          <p:cNvPr id="11" name="Picture 10" descr="s6_3.png"/>
+          <p:cNvPr id="13" name="Picture 12" descr="crop_s6_3.png"/>
           <p:cNvPicPr>
             <a:picLocks noChangeAspect="1"/>
           </p:cNvPicPr>
@@ -8313,8 +8414,8 @@
         </p:blipFill>
         <p:spPr>
           <a:xfrm>
-            <a:off x="822960" y="3447288"/>
-            <a:ext cx="1993391" cy="1395158"/>
+            <a:off x="841247" y="3739896"/>
+            <a:ext cx="1920240" cy="1470259"/>
           </a:xfrm>
           <a:prstGeom prst="rect">
             <a:avLst/>
@@ -8323,14 +8424,14 @@
       </p:pic>
       <p:sp>
         <p:nvSpPr>
-          <p:cNvPr id="12" name="TextBox 11"/>
-          <p:cNvSpPr txBox="1"/>
-          <p:nvPr/>
-        </p:nvSpPr>
-        <p:spPr>
-          <a:xfrm>
-            <a:off x="777240" y="4956048"/>
-            <a:ext cx="2084831" cy="228600"/>
+          <p:cNvPr id="14" name="TextBox 13"/>
+          <p:cNvSpPr txBox="1"/>
+          <p:nvPr/>
+        </p:nvSpPr>
+        <p:spPr>
+          <a:xfrm>
+            <a:off x="777240" y="5394960"/>
+            <a:ext cx="2048256" cy="384048"/>
           </a:xfrm>
           <a:prstGeom prst="rect">
             <a:avLst/>
@@ -8349,12 +8450,60 @@
               </a:lnSpc>
             </a:pPr>
             <a:r>
-              <a:rPr sz="850" b="0" spc="110">
+              <a:rPr sz="2100" b="1">
+                <a:solidFill>
+                  <a:srgbClr val="0D141C"/>
+                </a:solidFill>
+                <a:latin typeface="Consolas"/>
+              </a:rPr>
+              <a:t>25</a:t>
+            </a:r>
+            <a:r>
+              <a:rPr sz="1200" b="0">
                 <a:solidFill>
                   <a:srgbClr val="6B7A87"/>
                 </a:solidFill>
                 <a:latin typeface="Consolas"/>
               </a:rPr>
+              <a:t>/63</a:t>
+            </a:r>
+          </a:p>
+        </p:txBody>
+      </p:sp>
+      <p:sp>
+        <p:nvSpPr>
+          <p:cNvPr id="15" name="TextBox 14"/>
+          <p:cNvSpPr txBox="1"/>
+          <p:nvPr/>
+        </p:nvSpPr>
+        <p:spPr>
+          <a:xfrm>
+            <a:off x="777240" y="5797296"/>
+            <a:ext cx="2048256" cy="219456"/>
+          </a:xfrm>
+          <a:prstGeom prst="rect">
+            <a:avLst/>
+          </a:prstGeom>
+          <a:noFill/>
+        </p:spPr>
+        <p:txBody>
+          <a:bodyPr wrap="square" lIns="0" rIns="0" tIns="0" bIns="0">
+            <a:spAutoFit/>
+          </a:bodyPr>
+          <a:lstStyle/>
+          <a:p>
+            <a:pPr algn="ctr">
+              <a:lnSpc>
+                <a:spcPct val="124000"/>
+              </a:lnSpc>
+            </a:pPr>
+            <a:r>
+              <a:rPr sz="950" b="1" spc="110">
+                <a:solidFill>
+                  <a:srgbClr val="3B4A59"/>
+                </a:solidFill>
+                <a:latin typeface="Consolas"/>
+              </a:rPr>
               <a:t>BASELINE</a:t>
             </a:r>
           </a:p>
@@ -8362,14 +8511,53 @@
       </p:sp>
       <p:sp>
         <p:nvSpPr>
-          <p:cNvPr id="13" name="Rectangle 12"/>
+          <p:cNvPr id="16" name="TextBox 15"/>
+          <p:cNvSpPr txBox="1"/>
+          <p:nvPr/>
+        </p:nvSpPr>
+        <p:spPr>
+          <a:xfrm>
+            <a:off x="777240" y="6016752"/>
+            <a:ext cx="2048256" cy="219456"/>
+          </a:xfrm>
+          <a:prstGeom prst="rect">
+            <a:avLst/>
+          </a:prstGeom>
+          <a:noFill/>
+        </p:spPr>
+        <p:txBody>
+          <a:bodyPr wrap="square" lIns="0" rIns="0" tIns="0" bIns="0">
+            <a:spAutoFit/>
+          </a:bodyPr>
+          <a:lstStyle/>
+          <a:p>
+            <a:pPr algn="ctr">
+              <a:lnSpc>
+                <a:spcPct val="124000"/>
+              </a:lnSpc>
+            </a:pPr>
+            <a:r>
+              <a:rPr sz="900" b="0">
+                <a:solidFill>
+                  <a:srgbClr val="6B7A87"/>
+                </a:solidFill>
+                <a:latin typeface="Archivo"/>
+              </a:rPr>
+              <a:t>no screening</a:t>
+            </a:r>
+          </a:p>
+        </p:txBody>
+      </p:sp>
+      <p:sp>
+        <p:nvSpPr>
+          <p:cNvPr id="17" name="Rectangle 16"/>
           <p:cNvSpPr/>
           <p:nvPr/>
         </p:nvSpPr>
         <p:spPr>
           <a:xfrm>
-            <a:off x="2962656" y="3401568"/>
-            <a:ext cx="2084831" cy="1481328"/>
+            <a:off x="2916936" y="3675887"/>
+            <a:ext cx="2048256" cy="1627632"/>
           </a:xfrm>
           <a:prstGeom prst="rect">
             <a:avLst/>
@@ -8408,7 +8596,7 @@
       </p:sp>
       <p:pic>
         <p:nvPicPr>
-          <p:cNvPr id="14" name="Picture 13" descr="s6_4.png"/>
+          <p:cNvPr id="18" name="Picture 17" descr="crop_s6_4.png"/>
           <p:cNvPicPr>
             <a:picLocks noChangeAspect="1"/>
           </p:cNvPicPr>
@@ -8422,8 +8610,8 @@
         </p:blipFill>
         <p:spPr>
           <a:xfrm>
-            <a:off x="3008375" y="3447288"/>
-            <a:ext cx="1993391" cy="1374379"/>
+            <a:off x="2980944" y="3739896"/>
+            <a:ext cx="1920240" cy="1449829"/>
           </a:xfrm>
           <a:prstGeom prst="rect">
             <a:avLst/>
@@ -8432,14 +8620,14 @@
       </p:pic>
       <p:sp>
         <p:nvSpPr>
-          <p:cNvPr id="15" name="TextBox 14"/>
-          <p:cNvSpPr txBox="1"/>
-          <p:nvPr/>
-        </p:nvSpPr>
-        <p:spPr>
-          <a:xfrm>
-            <a:off x="2962656" y="4956048"/>
-            <a:ext cx="2084831" cy="228600"/>
+          <p:cNvPr id="19" name="TextBox 18"/>
+          <p:cNvSpPr txBox="1"/>
+          <p:nvPr/>
+        </p:nvSpPr>
+        <p:spPr>
+          <a:xfrm>
+            <a:off x="2916936" y="5394960"/>
+            <a:ext cx="2048256" cy="384048"/>
           </a:xfrm>
           <a:prstGeom prst="rect">
             <a:avLst/>
@@ -8458,12 +8646,60 @@
               </a:lnSpc>
             </a:pPr>
             <a:r>
-              <a:rPr sz="850" b="0" spc="110">
+              <a:rPr sz="2100" b="1">
+                <a:solidFill>
+                  <a:srgbClr val="0D141C"/>
+                </a:solidFill>
+                <a:latin typeface="Consolas"/>
+              </a:rPr>
+              <a:t>13</a:t>
+            </a:r>
+            <a:r>
+              <a:rPr sz="1200" b="0">
                 <a:solidFill>
                   <a:srgbClr val="6B7A87"/>
                 </a:solidFill>
                 <a:latin typeface="Consolas"/>
               </a:rPr>
+              <a:t>/63</a:t>
+            </a:r>
+          </a:p>
+        </p:txBody>
+      </p:sp>
+      <p:sp>
+        <p:nvSpPr>
+          <p:cNvPr id="20" name="TextBox 19"/>
+          <p:cNvSpPr txBox="1"/>
+          <p:nvPr/>
+        </p:nvSpPr>
+        <p:spPr>
+          <a:xfrm>
+            <a:off x="2916936" y="5797296"/>
+            <a:ext cx="2048256" cy="219456"/>
+          </a:xfrm>
+          <a:prstGeom prst="rect">
+            <a:avLst/>
+          </a:prstGeom>
+          <a:noFill/>
+        </p:spPr>
+        <p:txBody>
+          <a:bodyPr wrap="square" lIns="0" rIns="0" tIns="0" bIns="0">
+            <a:spAutoFit/>
+          </a:bodyPr>
+          <a:lstStyle/>
+          <a:p>
+            <a:pPr algn="ctr">
+              <a:lnSpc>
+                <a:spcPct val="124000"/>
+              </a:lnSpc>
+            </a:pPr>
+            <a:r>
+              <a:rPr sz="950" b="1" spc="110">
+                <a:solidFill>
+                  <a:srgbClr val="3B4A59"/>
+                </a:solidFill>
+                <a:latin typeface="Consolas"/>
+              </a:rPr>
               <a:t>TEST 2</a:t>
             </a:r>
           </a:p>
@@ -8471,14 +8707,53 @@
       </p:sp>
       <p:sp>
         <p:nvSpPr>
-          <p:cNvPr id="16" name="Rectangle 15"/>
+          <p:cNvPr id="21" name="TextBox 20"/>
+          <p:cNvSpPr txBox="1"/>
+          <p:nvPr/>
+        </p:nvSpPr>
+        <p:spPr>
+          <a:xfrm>
+            <a:off x="2916936" y="6016752"/>
+            <a:ext cx="2048256" cy="219456"/>
+          </a:xfrm>
+          <a:prstGeom prst="rect">
+            <a:avLst/>
+          </a:prstGeom>
+          <a:noFill/>
+        </p:spPr>
+        <p:txBody>
+          <a:bodyPr wrap="square" lIns="0" rIns="0" tIns="0" bIns="0">
+            <a:spAutoFit/>
+          </a:bodyPr>
+          <a:lstStyle/>
+          <a:p>
+            <a:pPr algn="ctr">
+              <a:lnSpc>
+                <a:spcPct val="124000"/>
+              </a:lnSpc>
+            </a:pPr>
+            <a:r>
+              <a:rPr sz="900" b="0">
+                <a:solidFill>
+                  <a:srgbClr val="6B7A87"/>
+                </a:solidFill>
+                <a:latin typeface="Archivo"/>
+              </a:rPr>
+              <a:t>task</a:t>
+            </a:r>
+          </a:p>
+        </p:txBody>
+      </p:sp>
+      <p:sp>
+        <p:nvSpPr>
+          <p:cNvPr id="22" name="Rectangle 21"/>
           <p:cNvSpPr/>
           <p:nvPr/>
         </p:nvSpPr>
         <p:spPr>
           <a:xfrm>
-            <a:off x="5148071" y="3401568"/>
-            <a:ext cx="2084831" cy="1481328"/>
+            <a:off x="5056632" y="3675887"/>
+            <a:ext cx="2048256" cy="1627632"/>
           </a:xfrm>
           <a:prstGeom prst="rect">
             <a:avLst/>
@@ -8517,7 +8792,7 @@
       </p:sp>
       <p:pic>
         <p:nvPicPr>
-          <p:cNvPr id="17" name="Picture 16" descr="s6_5.png"/>
+          <p:cNvPr id="23" name="Picture 22" descr="crop_s6_5.png"/>
           <p:cNvPicPr>
             <a:picLocks noChangeAspect="1"/>
           </p:cNvPicPr>
@@ -8531,8 +8806,8 @@
         </p:blipFill>
         <p:spPr>
           <a:xfrm>
-            <a:off x="5193791" y="3447288"/>
-            <a:ext cx="1993391" cy="1389728"/>
+            <a:off x="5120640" y="3739896"/>
+            <a:ext cx="1920240" cy="1463155"/>
           </a:xfrm>
           <a:prstGeom prst="rect">
             <a:avLst/>
@@ -8541,14 +8816,14 @@
       </p:pic>
       <p:sp>
         <p:nvSpPr>
-          <p:cNvPr id="18" name="TextBox 17"/>
-          <p:cNvSpPr txBox="1"/>
-          <p:nvPr/>
-        </p:nvSpPr>
-        <p:spPr>
-          <a:xfrm>
-            <a:off x="5148071" y="4956048"/>
-            <a:ext cx="2084831" cy="228600"/>
+          <p:cNvPr id="24" name="TextBox 23"/>
+          <p:cNvSpPr txBox="1"/>
+          <p:nvPr/>
+        </p:nvSpPr>
+        <p:spPr>
+          <a:xfrm>
+            <a:off x="5056632" y="5394960"/>
+            <a:ext cx="2048256" cy="384048"/>
           </a:xfrm>
           <a:prstGeom prst="rect">
             <a:avLst/>
@@ -8567,12 +8842,60 @@
               </a:lnSpc>
             </a:pPr>
             <a:r>
-              <a:rPr sz="850" b="0" spc="110">
+              <a:rPr sz="2100" b="1">
+                <a:solidFill>
+                  <a:srgbClr val="0D141C"/>
+                </a:solidFill>
+                <a:latin typeface="Consolas"/>
+              </a:rPr>
+              <a:t>23</a:t>
+            </a:r>
+            <a:r>
+              <a:rPr sz="1200" b="0">
                 <a:solidFill>
                   <a:srgbClr val="6B7A87"/>
                 </a:solidFill>
                 <a:latin typeface="Consolas"/>
               </a:rPr>
+              <a:t>/63</a:t>
+            </a:r>
+          </a:p>
+        </p:txBody>
+      </p:sp>
+      <p:sp>
+        <p:nvSpPr>
+          <p:cNvPr id="25" name="TextBox 24"/>
+          <p:cNvSpPr txBox="1"/>
+          <p:nvPr/>
+        </p:nvSpPr>
+        <p:spPr>
+          <a:xfrm>
+            <a:off x="5056632" y="5797296"/>
+            <a:ext cx="2048256" cy="219456"/>
+          </a:xfrm>
+          <a:prstGeom prst="rect">
+            <a:avLst/>
+          </a:prstGeom>
+          <a:noFill/>
+        </p:spPr>
+        <p:txBody>
+          <a:bodyPr wrap="square" lIns="0" rIns="0" tIns="0" bIns="0">
+            <a:spAutoFit/>
+          </a:bodyPr>
+          <a:lstStyle/>
+          <a:p>
+            <a:pPr algn="ctr">
+              <a:lnSpc>
+                <a:spcPct val="124000"/>
+              </a:lnSpc>
+            </a:pPr>
+            <a:r>
+              <a:rPr sz="950" b="1" spc="110">
+                <a:solidFill>
+                  <a:srgbClr val="3B4A59"/>
+                </a:solidFill>
+                <a:latin typeface="Consolas"/>
+              </a:rPr>
               <a:t>TEST 3</a:t>
             </a:r>
           </a:p>
@@ -8580,14 +8903,53 @@
       </p:sp>
       <p:sp>
         <p:nvSpPr>
-          <p:cNvPr id="19" name="Rectangle 18"/>
+          <p:cNvPr id="26" name="TextBox 25"/>
+          <p:cNvSpPr txBox="1"/>
+          <p:nvPr/>
+        </p:nvSpPr>
+        <p:spPr>
+          <a:xfrm>
+            <a:off x="5056632" y="6016752"/>
+            <a:ext cx="2048256" cy="219456"/>
+          </a:xfrm>
+          <a:prstGeom prst="rect">
+            <a:avLst/>
+          </a:prstGeom>
+          <a:noFill/>
+        </p:spPr>
+        <p:txBody>
+          <a:bodyPr wrap="square" lIns="0" rIns="0" tIns="0" bIns="0">
+            <a:spAutoFit/>
+          </a:bodyPr>
+          <a:lstStyle/>
+          <a:p>
+            <a:pPr algn="ctr">
+              <a:lnSpc>
+                <a:spcPct val="124000"/>
+              </a:lnSpc>
+            </a:pPr>
+            <a:r>
+              <a:rPr sz="900" b="0">
+                <a:solidFill>
+                  <a:srgbClr val="6B7A87"/>
+                </a:solidFill>
+                <a:latin typeface="Archivo"/>
+              </a:rPr>
+              <a:t>survey</a:t>
+            </a:r>
+          </a:p>
+        </p:txBody>
+      </p:sp>
+      <p:sp>
+        <p:nvSpPr>
+          <p:cNvPr id="27" name="Rectangle 26"/>
           <p:cNvSpPr/>
           <p:nvPr/>
         </p:nvSpPr>
         <p:spPr>
           <a:xfrm>
-            <a:off x="7333488" y="3401568"/>
-            <a:ext cx="2084831" cy="1481328"/>
+            <a:off x="7196328" y="3675887"/>
+            <a:ext cx="2048256" cy="1627632"/>
           </a:xfrm>
           <a:prstGeom prst="rect">
             <a:avLst/>
@@ -8626,7 +8988,7 @@
       </p:sp>
       <p:pic>
         <p:nvPicPr>
-          <p:cNvPr id="20" name="Picture 19" descr="s6_6.png"/>
+          <p:cNvPr id="28" name="Picture 27" descr="crop_s6_6.png"/>
           <p:cNvPicPr>
             <a:picLocks noChangeAspect="1"/>
           </p:cNvPicPr>
@@ -8640,8 +9002,8 @@
         </p:blipFill>
         <p:spPr>
           <a:xfrm>
-            <a:off x="7379208" y="3447288"/>
-            <a:ext cx="1993391" cy="1385018"/>
+            <a:off x="7260336" y="3739896"/>
+            <a:ext cx="1920240" cy="1458806"/>
           </a:xfrm>
           <a:prstGeom prst="rect">
             <a:avLst/>
@@ -8650,14 +9012,14 @@
       </p:pic>
       <p:sp>
         <p:nvSpPr>
-          <p:cNvPr id="21" name="TextBox 20"/>
-          <p:cNvSpPr txBox="1"/>
-          <p:nvPr/>
-        </p:nvSpPr>
-        <p:spPr>
-          <a:xfrm>
-            <a:off x="7333488" y="4956048"/>
-            <a:ext cx="2084831" cy="228600"/>
+          <p:cNvPr id="29" name="TextBox 28"/>
+          <p:cNvSpPr txBox="1"/>
+          <p:nvPr/>
+        </p:nvSpPr>
+        <p:spPr>
+          <a:xfrm>
+            <a:off x="7196328" y="5394960"/>
+            <a:ext cx="2048256" cy="384048"/>
           </a:xfrm>
           <a:prstGeom prst="rect">
             <a:avLst/>
@@ -8676,12 +9038,60 @@
               </a:lnSpc>
             </a:pPr>
             <a:r>
-              <a:rPr sz="850" b="0" spc="110">
+              <a:rPr sz="2100" b="1">
+                <a:solidFill>
+                  <a:srgbClr val="0D141C"/>
+                </a:solidFill>
+                <a:latin typeface="Consolas"/>
+              </a:rPr>
+              <a:t>13</a:t>
+            </a:r>
+            <a:r>
+              <a:rPr sz="1200" b="0">
                 <a:solidFill>
                   <a:srgbClr val="6B7A87"/>
                 </a:solidFill>
                 <a:latin typeface="Consolas"/>
               </a:rPr>
+              <a:t>/63</a:t>
+            </a:r>
+          </a:p>
+        </p:txBody>
+      </p:sp>
+      <p:sp>
+        <p:nvSpPr>
+          <p:cNvPr id="30" name="TextBox 29"/>
+          <p:cNvSpPr txBox="1"/>
+          <p:nvPr/>
+        </p:nvSpPr>
+        <p:spPr>
+          <a:xfrm>
+            <a:off x="7196328" y="5797296"/>
+            <a:ext cx="2048256" cy="219456"/>
+          </a:xfrm>
+          <a:prstGeom prst="rect">
+            <a:avLst/>
+          </a:prstGeom>
+          <a:noFill/>
+        </p:spPr>
+        <p:txBody>
+          <a:bodyPr wrap="square" lIns="0" rIns="0" tIns="0" bIns="0">
+            <a:spAutoFit/>
+          </a:bodyPr>
+          <a:lstStyle/>
+          <a:p>
+            <a:pPr algn="ctr">
+              <a:lnSpc>
+                <a:spcPct val="124000"/>
+              </a:lnSpc>
+            </a:pPr>
+            <a:r>
+              <a:rPr sz="950" b="1" spc="110">
+                <a:solidFill>
+                  <a:srgbClr val="3B4A59"/>
+                </a:solidFill>
+                <a:latin typeface="Consolas"/>
+              </a:rPr>
               <a:t>TEST 4</a:t>
             </a:r>
           </a:p>
@@ -8689,14 +9099,53 @@
       </p:sp>
       <p:sp>
         <p:nvSpPr>
-          <p:cNvPr id="22" name="Rectangle 21"/>
+          <p:cNvPr id="31" name="TextBox 30"/>
+          <p:cNvSpPr txBox="1"/>
+          <p:nvPr/>
+        </p:nvSpPr>
+        <p:spPr>
+          <a:xfrm>
+            <a:off x="7196328" y="6016752"/>
+            <a:ext cx="2048256" cy="219456"/>
+          </a:xfrm>
+          <a:prstGeom prst="rect">
+            <a:avLst/>
+          </a:prstGeom>
+          <a:noFill/>
+        </p:spPr>
+        <p:txBody>
+          <a:bodyPr wrap="square" lIns="0" rIns="0" tIns="0" bIns="0">
+            <a:spAutoFit/>
+          </a:bodyPr>
+          <a:lstStyle/>
+          <a:p>
+            <a:pPr algn="ctr">
+              <a:lnSpc>
+                <a:spcPct val="124000"/>
+              </a:lnSpc>
+            </a:pPr>
+            <a:r>
+              <a:rPr sz="900" b="0">
+                <a:solidFill>
+                  <a:srgbClr val="6B7A87"/>
+                </a:solidFill>
+                <a:latin typeface="Archivo"/>
+              </a:rPr>
+              <a:t>task + survey</a:t>
+            </a:r>
+          </a:p>
+        </p:txBody>
+      </p:sp>
+      <p:sp>
+        <p:nvSpPr>
+          <p:cNvPr id="32" name="Rectangle 31"/>
           <p:cNvSpPr/>
           <p:nvPr/>
         </p:nvSpPr>
         <p:spPr>
           <a:xfrm>
-            <a:off x="9518903" y="3401568"/>
-            <a:ext cx="2084831" cy="1481328"/>
+            <a:off x="9336024" y="3675887"/>
+            <a:ext cx="2048256" cy="1627632"/>
           </a:xfrm>
           <a:prstGeom prst="rect">
             <a:avLst/>
@@ -8706,7 +9155,7 @@
           </a:solidFill>
           <a:ln w="9525">
             <a:solidFill>
-              <a:srgbClr val="D3DBE2"/>
+              <a:srgbClr val="2F7565"/>
             </a:solidFill>
           </a:ln>
           <a:effectLst/>
@@ -8735,7 +9184,7 @@
       </p:sp>
       <p:pic>
         <p:nvPicPr>
-          <p:cNvPr id="23" name="Picture 22" descr="s6_7.png"/>
+          <p:cNvPr id="33" name="Picture 32" descr="crop_s6_7.png"/>
           <p:cNvPicPr>
             <a:picLocks noChangeAspect="1"/>
           </p:cNvPicPr>
@@ -8749,8 +9198,8 @@
         </p:blipFill>
         <p:spPr>
           <a:xfrm>
-            <a:off x="9564624" y="3447288"/>
-            <a:ext cx="1993391" cy="1370322"/>
+            <a:off x="9400032" y="3739896"/>
+            <a:ext cx="1920240" cy="1443162"/>
           </a:xfrm>
           <a:prstGeom prst="rect">
             <a:avLst/>
@@ -8759,14 +9208,14 @@
       </p:pic>
       <p:sp>
         <p:nvSpPr>
-          <p:cNvPr id="24" name="TextBox 23"/>
-          <p:cNvSpPr txBox="1"/>
-          <p:nvPr/>
-        </p:nvSpPr>
-        <p:spPr>
-          <a:xfrm>
-            <a:off x="9518903" y="4956048"/>
-            <a:ext cx="2084831" cy="228600"/>
+          <p:cNvPr id="34" name="TextBox 33"/>
+          <p:cNvSpPr txBox="1"/>
+          <p:nvPr/>
+        </p:nvSpPr>
+        <p:spPr>
+          <a:xfrm>
+            <a:off x="9336024" y="5394960"/>
+            <a:ext cx="2048256" cy="384048"/>
           </a:xfrm>
           <a:prstGeom prst="rect">
             <a:avLst/>
@@ -8785,12 +9234,60 @@
               </a:lnSpc>
             </a:pPr>
             <a:r>
-              <a:rPr sz="850" b="0" spc="110">
+              <a:rPr sz="2100" b="1">
+                <a:solidFill>
+                  <a:srgbClr val="2F7565"/>
+                </a:solidFill>
+                <a:latin typeface="Consolas"/>
+              </a:rPr>
+              <a:t>11</a:t>
+            </a:r>
+            <a:r>
+              <a:rPr sz="1200" b="0">
                 <a:solidFill>
                   <a:srgbClr val="6B7A87"/>
                 </a:solidFill>
                 <a:latin typeface="Consolas"/>
               </a:rPr>
+              <a:t>/63</a:t>
+            </a:r>
+          </a:p>
+        </p:txBody>
+      </p:sp>
+      <p:sp>
+        <p:nvSpPr>
+          <p:cNvPr id="35" name="TextBox 34"/>
+          <p:cNvSpPr txBox="1"/>
+          <p:nvPr/>
+        </p:nvSpPr>
+        <p:spPr>
+          <a:xfrm>
+            <a:off x="9336024" y="5797296"/>
+            <a:ext cx="2048256" cy="219456"/>
+          </a:xfrm>
+          <a:prstGeom prst="rect">
+            <a:avLst/>
+          </a:prstGeom>
+          <a:noFill/>
+        </p:spPr>
+        <p:txBody>
+          <a:bodyPr wrap="square" lIns="0" rIns="0" tIns="0" bIns="0">
+            <a:spAutoFit/>
+          </a:bodyPr>
+          <a:lstStyle/>
+          <a:p>
+            <a:pPr algn="ctr">
+              <a:lnSpc>
+                <a:spcPct val="124000"/>
+              </a:lnSpc>
+            </a:pPr>
+            <a:r>
+              <a:rPr sz="950" b="1" spc="110">
+                <a:solidFill>
+                  <a:srgbClr val="0D141C"/>
+                </a:solidFill>
+                <a:latin typeface="Consolas"/>
+              </a:rPr>
               <a:t>TEST 5</a:t>
             </a:r>
           </a:p>
@@ -8798,13 +9295,52 @@
       </p:sp>
       <p:sp>
         <p:nvSpPr>
-          <p:cNvPr id="25" name="Rectangle 24"/>
+          <p:cNvPr id="36" name="TextBox 35"/>
+          <p:cNvSpPr txBox="1"/>
+          <p:nvPr/>
+        </p:nvSpPr>
+        <p:spPr>
+          <a:xfrm>
+            <a:off x="9336024" y="6016752"/>
+            <a:ext cx="2048256" cy="219456"/>
+          </a:xfrm>
+          <a:prstGeom prst="rect">
+            <a:avLst/>
+          </a:prstGeom>
+          <a:noFill/>
+        </p:spPr>
+        <p:txBody>
+          <a:bodyPr wrap="square" lIns="0" rIns="0" tIns="0" bIns="0">
+            <a:spAutoFit/>
+          </a:bodyPr>
+          <a:lstStyle/>
+          <a:p>
+            <a:pPr algn="ctr">
+              <a:lnSpc>
+                <a:spcPct val="124000"/>
+              </a:lnSpc>
+            </a:pPr>
+            <a:r>
+              <a:rPr sz="900" b="0">
+                <a:solidFill>
+                  <a:srgbClr val="6B7A87"/>
+                </a:solidFill>
+                <a:latin typeface="Archivo"/>
+              </a:rPr>
+              <a:t>+ metrics</a:t>
+            </a:r>
+          </a:p>
+        </p:txBody>
+      </p:sp>
+      <p:sp>
+        <p:nvSpPr>
+          <p:cNvPr id="37" name="Rectangle 36"/>
           <p:cNvSpPr/>
           <p:nvPr/>
         </p:nvSpPr>
         <p:spPr>
           <a:xfrm>
-            <a:off x="777240" y="5358384"/>
+            <a:off x="777240" y="6327648"/>
             <a:ext cx="10607040" cy="12801"/>
           </a:xfrm>
           <a:prstGeom prst="rect">
@@ -8842,14 +9378,14 @@
       </p:sp>
       <p:sp>
         <p:nvSpPr>
-          <p:cNvPr id="26" name="TextBox 25"/>
-          <p:cNvSpPr txBox="1"/>
-          <p:nvPr/>
-        </p:nvSpPr>
-        <p:spPr>
-          <a:xfrm>
-            <a:off x="777240" y="5541264"/>
-            <a:ext cx="10607040" cy="822960"/>
+          <p:cNvPr id="38" name="TextBox 37"/>
+          <p:cNvSpPr txBox="1"/>
+          <p:nvPr/>
+        </p:nvSpPr>
+        <p:spPr>
+          <a:xfrm>
+            <a:off x="777240" y="6455664"/>
+            <a:ext cx="10607040" cy="274320"/>
           </a:xfrm>
           <a:prstGeom prst="rect">
             <a:avLst/>
@@ -8868,40 +9404,22 @@
               </a:lnSpc>
             </a:pPr>
             <a:r>
-              <a:rPr sz="1300" b="1">
+              <a:rPr sz="1050" b="1">
                 <a:solidFill>
                   <a:srgbClr val="0D141C"/>
                 </a:solidFill>
                 <a:latin typeface="Archivo"/>
               </a:rPr>
-              <a:t>25 of 63 correlations are significant on all 386 subjects</a:t>
-            </a:r>
-            <a:r>
-              <a:rPr sz="1300" b="0">
+              <a:t>~3 of 63 are expected by chance.</a:t>
+            </a:r>
+            <a:r>
+              <a:rPr sz="1050" b="0">
                 <a:solidFill>
                   <a:srgbClr val="3B4A59"/>
                 </a:solidFill>
                 <a:latin typeface="Archivo"/>
               </a:rPr>
-              <a:t> — about three are expected from noise alone. Excluding the 85 participants who failed an attention check leaves </a:t>
-            </a:r>
-            <a:r>
-              <a:rPr sz="1300" b="1">
-                <a:solidFill>
-                  <a:srgbClr val="0D141C"/>
-                </a:solidFill>
-                <a:latin typeface="Archivo"/>
-              </a:rPr>
-              <a:t>11</a:t>
-            </a:r>
-            <a:r>
-              <a:rPr sz="1300" b="0">
-                <a:solidFill>
-                  <a:srgbClr val="3B4A59"/>
-                </a:solidFill>
-                <a:latin typeface="Archivo"/>
-              </a:rPr>
-              <a:t>. Fourteen of the original findings do not survive quality control.</a:t>
+              <a:t>  Excluding the 85 who failed an attention check leaves 11 — fourteen findings do not survive quality control.</a:t>
             </a:r>
           </a:p>
         </p:txBody>
